--- a/HebronGuide_발표_김성수목사.pptx
+++ b/HebronGuide_발표_김성수목사.pptx
@@ -696,7 +696,7 @@
           <a:p>
             <a:r>
               <a:rPr lang="en-US" dirty="0"/>
-              <a:t>[12:15–13:20] 성경이 말하는 환대, 헬라어로 필로세니아예요. '낯선 사람을 사랑한다'는 뜻입니다. 아브라함 기억나시죠. 나그네 셋을 보자마자 달려나가요. 앉아서 기다린 게 아니라 뛰어나갑니다. 바울도 그래요. 아굴라 부부 집, 루디아 집 — 선교가 다 누군가의 집에서 일어났어요. 환대가 곧 선교였던 거죠. 하나님이 이걸 명령까지 하시는데, 이유가 뭔지 아세요? '너희도 한때 나그네였잖아.'  (연출: '달려나가'를 강조. 본문 길게 끌지 않는다.)</a:t>
+              <a:t>[12:15–13:20] 성경이 말하는 환대, 헬라어로 필로세니아예요. '낯선 사람을 사랑한다'는 뜻입니다. 아브라함 기억나시죠. 나그네 셋을 보자마자 달려나가요. 앉아서 기다린 게 아니라 뛰어나갑니다. 바울도 그래요. 아굴라 부부 집, 루디아 집 — 선교가 다 누군가의 집에서 일어났어요. 그래서 저는 이런 생각이 들어요. 초대교회는 어쩌면 '선교적 가정교회'였다고. 멋진 성전이 아니라 집(오이코스)에서, 식탁의 환대로 복음이 흘렀거든요. 건물도 전문가도 없었지만, 그게 가장 강력한 선교였습니다.  (연출: '선교적 가정교회'에서 잠시 멈춤. 스테처·마당 슬라이드와 연결.)</a:t>
             </a:r>
             <a:endParaRPr lang="en-US" dirty="0"/>
           </a:p>
@@ -3635,7 +3635,7 @@
                 <a:ea typeface="Malgun Gothic" pitchFamily="34" charset="-122"/>
                 <a:cs typeface="Malgun Gothic" pitchFamily="34" charset="-120"/>
               </a:rPr>
-              <a:t>신약 — 환대가 선교의 언어</a:t>
+              <a:t>신약 — 초대교회는 '선교적 가정교회'</a:t>
             </a:r>
             <a:endParaRPr lang="en-US" sz="1500" dirty="0"/>
           </a:p>
@@ -3681,7 +3681,7 @@
                 <a:ea typeface="Malgun Gothic" pitchFamily="34" charset="-122"/>
                 <a:cs typeface="Malgun Gothic" pitchFamily="34" charset="-120"/>
               </a:rPr>
-              <a:t>바울 — 아굴라·브리스길라 집에 머묾 (행 18:3)</a:t>
+              <a:t>아굴라·브리스길라의 집에서 (행 18:3)</a:t>
             </a:r>
             <a:endParaRPr lang="en-US" sz="1350" dirty="0"/>
           </a:p>
@@ -3729,7 +3729,7 @@
                 <a:ea typeface="Malgun Gothic" pitchFamily="34" charset="-122"/>
                 <a:cs typeface="Malgun Gothic" pitchFamily="34" charset="-120"/>
               </a:rPr>
-              <a:t>“손님 대접하기를 잊지 말라” (히 13:2)</a:t>
+              <a:t>날마다 집에서 떡을 떼며 (행 2:46)</a:t>
             </a:r>
             <a:endParaRPr lang="en-US" sz="1350" dirty="0"/>
           </a:p>
@@ -3743,7 +3743,7 @@
         </p:nvSpPr>
         <p:spPr>
           <a:xfrm>
-            <a:off x="822960" y="5486400"/>
+            <a:off x="822960" y="5440680"/>
             <a:ext cx="10515600" cy="640080"/>
           </a:xfrm>
           <a:prstGeom prst="rect">
@@ -3771,7 +3771,7 @@
                 <a:ea typeface="Malgun Gothic" pitchFamily="34" charset="-122"/>
                 <a:cs typeface="Malgun Gothic" pitchFamily="34" charset="-120"/>
               </a:rPr>
-              <a:t>하나님은 환대를 </a:t>
+              <a:t>초대교회는 어쩌면 </a:t>
             </a:r>
             <a:pPr algn="l" indent="0" marL="0">
               <a:lnSpc>
@@ -3782,47 +3782,47 @@
             <a:r>
               <a:rPr lang="en-US" sz="1450" b="1" dirty="0">
                 <a:solidFill>
+                  <a:srgbClr val="C9A227"/>
+                </a:solidFill>
+                <a:latin typeface="Malgun Gothic" pitchFamily="34" charset="0"/>
+                <a:ea typeface="Malgun Gothic" pitchFamily="34" charset="-122"/>
+                <a:cs typeface="Malgun Gothic" pitchFamily="34" charset="-120"/>
+              </a:rPr>
+              <a:t>'선교적 가정교회'</a:t>
+            </a:r>
+            <a:pPr algn="l" indent="0" marL="0">
+              <a:lnSpc>
+                <a:spcPct val="120000"/>
+              </a:lnSpc>
+              <a:buNone/>
+            </a:pPr>
+            <a:r>
+              <a:rPr lang="en-US" sz="1450" dirty="0">
+                <a:solidFill>
+                  <a:srgbClr val="9AA6C0"/>
+                </a:solidFill>
+                <a:latin typeface="Malgun Gothic" pitchFamily="34" charset="0"/>
+                <a:ea typeface="Malgun Gothic" pitchFamily="34" charset="-122"/>
+                <a:cs typeface="Malgun Gothic" pitchFamily="34" charset="-120"/>
+              </a:rPr>
+              <a:t>였습니다. 성전이 아니라 </a:t>
+            </a:r>
+            <a:pPr algn="l" indent="0" marL="0">
+              <a:lnSpc>
+                <a:spcPct val="120000"/>
+              </a:lnSpc>
+              <a:buNone/>
+            </a:pPr>
+            <a:r>
+              <a:rPr lang="en-US" sz="1450" b="1" dirty="0">
+                <a:solidFill>
                   <a:srgbClr val="F2F5FF"/>
                 </a:solidFill>
                 <a:latin typeface="Malgun Gothic" pitchFamily="34" charset="0"/>
                 <a:ea typeface="Malgun Gothic" pitchFamily="34" charset="-122"/>
                 <a:cs typeface="Malgun Gothic" pitchFamily="34" charset="-120"/>
               </a:rPr>
-              <a:t>명령</a:t>
-            </a:r>
-            <a:pPr algn="l" indent="0" marL="0">
-              <a:lnSpc>
-                <a:spcPct val="120000"/>
-              </a:lnSpc>
-              <a:buNone/>
-            </a:pPr>
-            <a:r>
-              <a:rPr lang="en-US" sz="1450" dirty="0">
-                <a:solidFill>
-                  <a:srgbClr val="9AA6C0"/>
-                </a:solidFill>
-                <a:latin typeface="Malgun Gothic" pitchFamily="34" charset="0"/>
-                <a:ea typeface="Malgun Gothic" pitchFamily="34" charset="-122"/>
-                <a:cs typeface="Malgun Gothic" pitchFamily="34" charset="-120"/>
-              </a:rPr>
-              <a:t>하셨습니다. 이유: </a:t>
-            </a:r>
-            <a:pPr algn="l" indent="0" marL="0">
-              <a:lnSpc>
-                <a:spcPct val="120000"/>
-              </a:lnSpc>
-              <a:buNone/>
-            </a:pPr>
-            <a:r>
-              <a:rPr lang="en-US" sz="1450" b="1" dirty="0">
-                <a:solidFill>
-                  <a:srgbClr val="F2F5FF"/>
-                </a:solidFill>
-                <a:latin typeface="Malgun Gothic" pitchFamily="34" charset="0"/>
-                <a:ea typeface="Malgun Gothic" pitchFamily="34" charset="-122"/>
-                <a:cs typeface="Malgun Gothic" pitchFamily="34" charset="-120"/>
-              </a:rPr>
-              <a:t>“너희도 한때 나그네였기 때문” (신 10:19)</a:t>
+              <a:t>집(오이코스)에서, 식탁의 환대로 복음이 흘렀습니다.</a:t>
             </a:r>
             <a:endParaRPr lang="en-US" sz="1450" dirty="0"/>
           </a:p>

--- a/HebronGuide_발표_김성수목사.pptx
+++ b/HebronGuide_발표_김성수목사.pptx
@@ -6017,18 +6017,18 @@
         </p:nvSpPr>
         <p:spPr>
           <a:xfrm>
-            <a:off x="3169768" y="2514600"/>
-            <a:ext cx="1005840" cy="1005840"/>
+            <a:off x="3101188" y="2468880"/>
+            <a:ext cx="1143000" cy="1143000"/>
           </a:xfrm>
           <a:prstGeom prst="roundRect">
             <a:avLst>
-              <a:gd name="adj" fmla="val 7273"/>
+              <a:gd name="adj" fmla="val 4800"/>
             </a:avLst>
           </a:prstGeom>
           <a:solidFill>
-            <a:srgbClr val="0E1320"/>
+            <a:srgbClr val="FFFFFF"/>
           </a:solidFill>
-          <a:ln w="19050">
+          <a:ln w="12700">
             <a:solidFill>
               <a:srgbClr val="6EE7B7"/>
             </a:solidFill>
@@ -6036,16 +6036,40 @@
           </a:ln>
         </p:spPr>
       </p:sp>
-      <p:sp>
-        <p:nvSpPr>
-          <p:cNvPr id="6" name="Text 4"/>
-          <p:cNvSpPr/>
-          <p:nvPr/>
-        </p:nvSpPr>
-        <p:spPr>
-          <a:xfrm>
-            <a:off x="3169768" y="2514600"/>
-            <a:ext cx="1005840" cy="1005840"/>
+      <p:pic>
+        <p:nvPicPr>
+          <p:cNvPr id="6" name="Image 0" descr="preencoded.png">    </p:cNvPr>
+          <p:cNvPicPr>
+            <a:picLocks noChangeAspect="1"/>
+          </p:cNvPicPr>
+          <p:nvPr/>
+        </p:nvPicPr>
+        <p:blipFill>
+          <a:blip r:embed="rId1"/>
+          <a:stretch>
+            <a:fillRect/>
+          </a:stretch>
+        </p:blipFill>
+        <p:spPr>
+          <a:xfrm>
+            <a:off x="3192628" y="2560320"/>
+            <a:ext cx="960120" cy="960120"/>
+          </a:xfrm>
+          <a:prstGeom prst="rect">
+            <a:avLst/>
+          </a:prstGeom>
+        </p:spPr>
+      </p:pic>
+      <p:sp>
+        <p:nvSpPr>
+          <p:cNvPr id="7" name="Text 4"/>
+          <p:cNvSpPr/>
+          <p:nvPr/>
+        </p:nvSpPr>
+        <p:spPr>
+          <a:xfrm>
+            <a:off x="1752448" y="3703320"/>
+            <a:ext cx="3840480" cy="292608"/>
           </a:xfrm>
           <a:prstGeom prst="rect">
             <a:avLst/>
@@ -6061,7 +6085,46 @@
               <a:buNone/>
             </a:pPr>
             <a:r>
-              <a:rPr lang="en-US" sz="1300" dirty="0">
+              <a:rPr lang="en-US" sz="1350" b="1" dirty="0">
+                <a:solidFill>
+                  <a:srgbClr val="6EE7B7"/>
+                </a:solidFill>
+                <a:latin typeface="Malgun Gothic" pitchFamily="34" charset="0"/>
+                <a:ea typeface="Malgun Gothic" pitchFamily="34" charset="-122"/>
+                <a:cs typeface="Malgun Gothic" pitchFamily="34" charset="-120"/>
+              </a:rPr>
+              <a:t>hebronguide.com</a:t>
+            </a:r>
+            <a:endParaRPr lang="en-US" sz="1350" dirty="0"/>
+          </a:p>
+        </p:txBody>
+      </p:sp>
+      <p:sp>
+        <p:nvSpPr>
+          <p:cNvPr id="8" name="Text 5"/>
+          <p:cNvSpPr/>
+          <p:nvPr/>
+        </p:nvSpPr>
+        <p:spPr>
+          <a:xfrm>
+            <a:off x="1752448" y="3977640"/>
+            <a:ext cx="3840480" cy="237744"/>
+          </a:xfrm>
+          <a:prstGeom prst="rect">
+            <a:avLst/>
+          </a:prstGeom>
+          <a:noFill/>
+          <a:ln/>
+        </p:spPr>
+        <p:txBody>
+          <a:bodyPr wrap="square" lIns="0" tIns="0" rIns="0" bIns="0" rtlCol="0" anchor="ctr"/>
+          <a:lstStyle/>
+          <a:p>
+            <a:pPr algn="ctr" indent="0" marL="0">
+              <a:buNone/>
+            </a:pPr>
+            <a:r>
+              <a:rPr lang="en-US" sz="1000" dirty="0">
                 <a:solidFill>
                   <a:srgbClr val="6A748C"/>
                 </a:solidFill>
@@ -6069,93 +6132,15 @@
                 <a:ea typeface="Malgun Gothic" pitchFamily="34" charset="-122"/>
                 <a:cs typeface="Malgun Gothic" pitchFamily="34" charset="-120"/>
               </a:rPr>
-              <a:t>QR</a:t>
-            </a:r>
-            <a:endParaRPr lang="en-US" sz="1300" dirty="0"/>
-          </a:p>
-        </p:txBody>
-      </p:sp>
-      <p:sp>
-        <p:nvSpPr>
-          <p:cNvPr id="7" name="Text 5"/>
-          <p:cNvSpPr/>
-          <p:nvPr/>
-        </p:nvSpPr>
-        <p:spPr>
-          <a:xfrm>
-            <a:off x="1752448" y="3584448"/>
-            <a:ext cx="3840480" cy="320040"/>
-          </a:xfrm>
-          <a:prstGeom prst="rect">
-            <a:avLst/>
-          </a:prstGeom>
-          <a:noFill/>
-          <a:ln/>
-        </p:spPr>
-        <p:txBody>
-          <a:bodyPr wrap="square" lIns="0" tIns="0" rIns="0" bIns="0" rtlCol="0" anchor="ctr"/>
-          <a:lstStyle/>
-          <a:p>
-            <a:pPr algn="ctr" indent="0" marL="0">
-              <a:buNone/>
-            </a:pPr>
-            <a:r>
-              <a:rPr lang="en-US" sz="1400" b="1" dirty="0">
-                <a:solidFill>
-                  <a:srgbClr val="6EE7B7"/>
-                </a:solidFill>
-                <a:latin typeface="Malgun Gothic" pitchFamily="34" charset="0"/>
-                <a:ea typeface="Malgun Gothic" pitchFamily="34" charset="-122"/>
-                <a:cs typeface="Malgun Gothic" pitchFamily="34" charset="-120"/>
-              </a:rPr>
-              <a:t>hebronguide.com</a:t>
-            </a:r>
-            <a:endParaRPr lang="en-US" sz="1400" dirty="0"/>
-          </a:p>
-        </p:txBody>
-      </p:sp>
-      <p:sp>
-        <p:nvSpPr>
-          <p:cNvPr id="8" name="Text 6"/>
-          <p:cNvSpPr/>
-          <p:nvPr/>
-        </p:nvSpPr>
-        <p:spPr>
-          <a:xfrm>
-            <a:off x="1752448" y="3858768"/>
-            <a:ext cx="3840480" cy="256032"/>
-          </a:xfrm>
-          <a:prstGeom prst="rect">
-            <a:avLst/>
-          </a:prstGeom>
-          <a:noFill/>
-          <a:ln/>
-        </p:spPr>
-        <p:txBody>
-          <a:bodyPr wrap="square" lIns="0" tIns="0" rIns="0" bIns="0" rtlCol="0" anchor="ctr"/>
-          <a:lstStyle/>
-          <a:p>
-            <a:pPr algn="ctr" indent="0" marL="0">
-              <a:buNone/>
-            </a:pPr>
-            <a:r>
-              <a:rPr lang="en-US" sz="1100" dirty="0">
-                <a:solidFill>
-                  <a:srgbClr val="6A748C"/>
-                </a:solidFill>
-                <a:latin typeface="Malgun Gothic" pitchFamily="34" charset="0"/>
-                <a:ea typeface="Malgun Gothic" pitchFamily="34" charset="-122"/>
-                <a:cs typeface="Malgun Gothic" pitchFamily="34" charset="-120"/>
-              </a:rPr>
-              <a:t>메인 사이트</a:t>
-            </a:r>
-            <a:endParaRPr lang="en-US" sz="1100" dirty="0"/>
-          </a:p>
-        </p:txBody>
-      </p:sp>
-      <p:sp>
-        <p:nvSpPr>
-          <p:cNvPr id="9" name="Shape 7"/>
+              <a:t>메인 사이트  ·  스캔하면 바로 연결</a:t>
+            </a:r>
+            <a:endParaRPr lang="en-US" sz="1000" dirty="0"/>
+          </a:p>
+        </p:txBody>
+      </p:sp>
+      <p:sp>
+        <p:nvSpPr>
+          <p:cNvPr id="9" name="Shape 6"/>
           <p:cNvSpPr/>
           <p:nvPr/>
         </p:nvSpPr>
@@ -6189,24 +6174,24 @@
       </p:sp>
       <p:sp>
         <p:nvSpPr>
-          <p:cNvPr id="10" name="Shape 8"/>
-          <p:cNvSpPr/>
-          <p:nvPr/>
-        </p:nvSpPr>
-        <p:spPr>
-          <a:xfrm>
-            <a:off x="8016088" y="2514600"/>
-            <a:ext cx="1005840" cy="1005840"/>
+          <p:cNvPr id="10" name="Shape 7"/>
+          <p:cNvSpPr/>
+          <p:nvPr/>
+        </p:nvSpPr>
+        <p:spPr>
+          <a:xfrm>
+            <a:off x="7947508" y="2468880"/>
+            <a:ext cx="1143000" cy="1143000"/>
           </a:xfrm>
           <a:prstGeom prst="roundRect">
             <a:avLst>
-              <a:gd name="adj" fmla="val 7273"/>
+              <a:gd name="adj" fmla="val 4800"/>
             </a:avLst>
           </a:prstGeom>
           <a:solidFill>
-            <a:srgbClr val="0E1320"/>
+            <a:srgbClr val="FFFFFF"/>
           </a:solidFill>
-          <a:ln w="19050">
+          <a:ln w="12700">
             <a:solidFill>
               <a:srgbClr val="C9A227"/>
             </a:solidFill>
@@ -6214,16 +6199,40 @@
           </a:ln>
         </p:spPr>
       </p:sp>
-      <p:sp>
-        <p:nvSpPr>
-          <p:cNvPr id="11" name="Text 9"/>
-          <p:cNvSpPr/>
-          <p:nvPr/>
-        </p:nvSpPr>
-        <p:spPr>
-          <a:xfrm>
-            <a:off x="8016088" y="2514600"/>
-            <a:ext cx="1005840" cy="1005840"/>
+      <p:pic>
+        <p:nvPicPr>
+          <p:cNvPr id="11" name="Image 1" descr="preencoded.png">    </p:cNvPr>
+          <p:cNvPicPr>
+            <a:picLocks noChangeAspect="1"/>
+          </p:cNvPicPr>
+          <p:nvPr/>
+        </p:nvPicPr>
+        <p:blipFill>
+          <a:blip r:embed="rId2"/>
+          <a:stretch>
+            <a:fillRect/>
+          </a:stretch>
+        </p:blipFill>
+        <p:spPr>
+          <a:xfrm>
+            <a:off x="8038948" y="2560320"/>
+            <a:ext cx="960120" cy="960120"/>
+          </a:xfrm>
+          <a:prstGeom prst="rect">
+            <a:avLst/>
+          </a:prstGeom>
+        </p:spPr>
+      </p:pic>
+      <p:sp>
+        <p:nvSpPr>
+          <p:cNvPr id="12" name="Text 8"/>
+          <p:cNvSpPr/>
+          <p:nvPr/>
+        </p:nvSpPr>
+        <p:spPr>
+          <a:xfrm>
+            <a:off x="6598768" y="3703320"/>
+            <a:ext cx="3840480" cy="292608"/>
           </a:xfrm>
           <a:prstGeom prst="rect">
             <a:avLst/>
@@ -6239,7 +6248,46 @@
               <a:buNone/>
             </a:pPr>
             <a:r>
-              <a:rPr lang="en-US" sz="1300" dirty="0">
+              <a:rPr lang="en-US" sz="1350" b="1" dirty="0">
+                <a:solidFill>
+                  <a:srgbClr val="C9A227"/>
+                </a:solidFill>
+                <a:latin typeface="Malgun Gothic" pitchFamily="34" charset="0"/>
+                <a:ea typeface="Malgun Gothic" pitchFamily="34" charset="-122"/>
+                <a:cs typeface="Malgun Gothic" pitchFamily="34" charset="-120"/>
+              </a:rPr>
+              <a:t>hebronguide.com/church-guide</a:t>
+            </a:r>
+            <a:endParaRPr lang="en-US" sz="1350" dirty="0"/>
+          </a:p>
+        </p:txBody>
+      </p:sp>
+      <p:sp>
+        <p:nvSpPr>
+          <p:cNvPr id="13" name="Text 9"/>
+          <p:cNvSpPr/>
+          <p:nvPr/>
+        </p:nvSpPr>
+        <p:spPr>
+          <a:xfrm>
+            <a:off x="6598768" y="3977640"/>
+            <a:ext cx="3840480" cy="237744"/>
+          </a:xfrm>
+          <a:prstGeom prst="rect">
+            <a:avLst/>
+          </a:prstGeom>
+          <a:noFill/>
+          <a:ln/>
+        </p:spPr>
+        <p:txBody>
+          <a:bodyPr wrap="square" lIns="0" tIns="0" rIns="0" bIns="0" rtlCol="0" anchor="ctr"/>
+          <a:lstStyle/>
+          <a:p>
+            <a:pPr algn="ctr" indent="0" marL="0">
+              <a:buNone/>
+            </a:pPr>
+            <a:r>
+              <a:rPr lang="en-US" sz="1000" dirty="0">
                 <a:solidFill>
                   <a:srgbClr val="6A748C"/>
                 </a:solidFill>
@@ -6247,93 +6295,15 @@
                 <a:ea typeface="Malgun Gothic" pitchFamily="34" charset="-122"/>
                 <a:cs typeface="Malgun Gothic" pitchFamily="34" charset="-120"/>
               </a:rPr>
-              <a:t>QR</a:t>
-            </a:r>
-            <a:endParaRPr lang="en-US" sz="1300" dirty="0"/>
-          </a:p>
-        </p:txBody>
-      </p:sp>
-      <p:sp>
-        <p:nvSpPr>
-          <p:cNvPr id="12" name="Text 10"/>
-          <p:cNvSpPr/>
-          <p:nvPr/>
-        </p:nvSpPr>
-        <p:spPr>
-          <a:xfrm>
-            <a:off x="6598768" y="3584448"/>
-            <a:ext cx="3840480" cy="320040"/>
-          </a:xfrm>
-          <a:prstGeom prst="rect">
-            <a:avLst/>
-          </a:prstGeom>
-          <a:noFill/>
-          <a:ln/>
-        </p:spPr>
-        <p:txBody>
-          <a:bodyPr wrap="square" lIns="0" tIns="0" rIns="0" bIns="0" rtlCol="0" anchor="ctr"/>
-          <a:lstStyle/>
-          <a:p>
-            <a:pPr algn="ctr" indent="0" marL="0">
-              <a:buNone/>
-            </a:pPr>
-            <a:r>
-              <a:rPr lang="en-US" sz="1400" b="1" dirty="0">
-                <a:solidFill>
-                  <a:srgbClr val="C9A227"/>
-                </a:solidFill>
-                <a:latin typeface="Malgun Gothic" pitchFamily="34" charset="0"/>
-                <a:ea typeface="Malgun Gothic" pitchFamily="34" charset="-122"/>
-                <a:cs typeface="Malgun Gothic" pitchFamily="34" charset="-120"/>
-              </a:rPr>
-              <a:t>hebronguide.com/church-guide</a:t>
-            </a:r>
-            <a:endParaRPr lang="en-US" sz="1400" dirty="0"/>
-          </a:p>
-        </p:txBody>
-      </p:sp>
-      <p:sp>
-        <p:nvSpPr>
-          <p:cNvPr id="13" name="Text 11"/>
-          <p:cNvSpPr/>
-          <p:nvPr/>
-        </p:nvSpPr>
-        <p:spPr>
-          <a:xfrm>
-            <a:off x="6598768" y="3858768"/>
-            <a:ext cx="3840480" cy="256032"/>
-          </a:xfrm>
-          <a:prstGeom prst="rect">
-            <a:avLst/>
-          </a:prstGeom>
-          <a:noFill/>
-          <a:ln/>
-        </p:spPr>
-        <p:txBody>
-          <a:bodyPr wrap="square" lIns="0" tIns="0" rIns="0" bIns="0" rtlCol="0" anchor="ctr"/>
-          <a:lstStyle/>
-          <a:p>
-            <a:pPr algn="ctr" indent="0" marL="0">
-              <a:buNone/>
-            </a:pPr>
-            <a:r>
-              <a:rPr lang="en-US" sz="1100" dirty="0">
-                <a:solidFill>
-                  <a:srgbClr val="6A748C"/>
-                </a:solidFill>
-                <a:latin typeface="Malgun Gothic" pitchFamily="34" charset="0"/>
-                <a:ea typeface="Malgun Gothic" pitchFamily="34" charset="-122"/>
-                <a:cs typeface="Malgun Gothic" pitchFamily="34" charset="-120"/>
-              </a:rPr>
-              <a:t>교회 무료 등재</a:t>
-            </a:r>
-            <a:endParaRPr lang="en-US" sz="1100" dirty="0"/>
-          </a:p>
-        </p:txBody>
-      </p:sp>
-      <p:sp>
-        <p:nvSpPr>
-          <p:cNvPr id="14" name="Shape 12"/>
+              <a:t>교회 무료 등재  ·  스캔하면 바로 연결</a:t>
+            </a:r>
+            <a:endParaRPr lang="en-US" sz="1000" dirty="0"/>
+          </a:p>
+        </p:txBody>
+      </p:sp>
+      <p:sp>
+        <p:nvSpPr>
+          <p:cNvPr id="14" name="Shape 10"/>
           <p:cNvSpPr/>
           <p:nvPr/>
         </p:nvSpPr>
@@ -6360,7 +6330,7 @@
       </p:sp>
       <p:sp>
         <p:nvSpPr>
-          <p:cNvPr id="15" name="Text 13"/>
+          <p:cNvPr id="15" name="Text 11"/>
           <p:cNvSpPr/>
           <p:nvPr/>
         </p:nvSpPr>
@@ -6399,7 +6369,7 @@
       </p:sp>
       <p:sp>
         <p:nvSpPr>
-          <p:cNvPr id="16" name="Shape 14"/>
+          <p:cNvPr id="16" name="Shape 12"/>
           <p:cNvSpPr/>
           <p:nvPr/>
         </p:nvSpPr>
@@ -6426,7 +6396,7 @@
       </p:sp>
       <p:sp>
         <p:nvSpPr>
-          <p:cNvPr id="17" name="Text 15"/>
+          <p:cNvPr id="17" name="Text 13"/>
           <p:cNvSpPr/>
           <p:nvPr/>
         </p:nvSpPr>
@@ -6465,7 +6435,7 @@
       </p:sp>
       <p:sp>
         <p:nvSpPr>
-          <p:cNvPr id="18" name="Shape 16"/>
+          <p:cNvPr id="18" name="Shape 14"/>
           <p:cNvSpPr/>
           <p:nvPr/>
         </p:nvSpPr>
@@ -6492,7 +6462,7 @@
       </p:sp>
       <p:sp>
         <p:nvSpPr>
-          <p:cNvPr id="19" name="Text 17"/>
+          <p:cNvPr id="19" name="Text 15"/>
           <p:cNvSpPr/>
           <p:nvPr/>
         </p:nvSpPr>
@@ -6531,7 +6501,7 @@
       </p:sp>
       <p:sp>
         <p:nvSpPr>
-          <p:cNvPr id="20" name="Shape 18"/>
+          <p:cNvPr id="20" name="Shape 16"/>
           <p:cNvSpPr/>
           <p:nvPr/>
         </p:nvSpPr>
@@ -6558,7 +6528,7 @@
       </p:sp>
       <p:sp>
         <p:nvSpPr>
-          <p:cNvPr id="21" name="Text 19"/>
+          <p:cNvPr id="21" name="Text 17"/>
           <p:cNvSpPr/>
           <p:nvPr/>
         </p:nvSpPr>
@@ -6597,7 +6567,7 @@
       </p:sp>
       <p:sp>
         <p:nvSpPr>
-          <p:cNvPr id="22" name="Text 20"/>
+          <p:cNvPr id="22" name="Text 18"/>
           <p:cNvSpPr/>
           <p:nvPr/>
         </p:nvSpPr>
